--- a/docs/reports/yc-agent-companies-spring-2025-v2.pptx
+++ b/docs/reports/yc-agent-companies-spring-2025-v2.pptx
@@ -16824,7 +16824,7 @@
                 </a:solidFill>
                 <a:latin typeface="Aptos"/>
               </a:rPr>
-              <a:t>Capacitive</a:t>
+              <a:t>Airweave</a:t>
             </a:r>
           </a:p>
         </p:txBody>
@@ -16869,7 +16869,7 @@
                 </a:solidFill>
                 <a:latin typeface="Aptos"/>
               </a:rPr>
-              <a:t>2p</a:t>
+              <a:t>7p</a:t>
             </a:r>
           </a:p>
         </p:txBody>
@@ -16914,7 +16914,7 @@
                 </a:solidFill>
                 <a:latin typeface="Aptos"/>
               </a:rPr>
-              <a:t>As of January 2026, Capacitive has ceased all operations and discontinued support for its Commons platform.</a:t>
+              <a:t>The open-source context retrieval layer for agents</a:t>
             </a:r>
           </a:p>
         </p:txBody>
